--- a/courses/build/mentor-3day/M-D2.pptx
+++ b/courses/build/mentor-3day/M-D2.pptx
@@ -4632,7 +4632,7 @@
     <p:bg>
       <p:bgPr>
         <a:solidFill>
-          <a:srgbClr val="1F4D2B"/>
+          <a:srgbClr val="2E3440"/>
         </a:solidFill>
         <a:effectLst/>
       </p:bgPr>
@@ -4674,9 +4674,9 @@
             <a:r>
               <a:rPr sz="1000" b="0">
                 <a:solidFill>
-                  <a:srgbClr val="A8D88A"/>
-                </a:solidFill>
-                <a:latin typeface="Arial"/>
+                  <a:srgbClr val="FAF7F0"/>
+                </a:solidFill>
+                <a:latin typeface="Calibri"/>
               </a:rPr>
               <a:t>M-D2-01</a:t>
             </a:r>
@@ -4713,9 +4713,9 @@
             <a:r>
               <a:rPr sz="1000" b="0">
                 <a:solidFill>
-                  <a:srgbClr val="A8D88A"/>
-                </a:solidFill>
-                <a:latin typeface="Arial"/>
+                  <a:srgbClr val="FAF7F0"/>
+                </a:solidFill>
+                <a:latin typeface="Calibri"/>
               </a:rPr>
               <a:t>Walking With Farmers</a:t>
             </a:r>
@@ -4752,7 +4752,7 @@
             <a:r>
               <a:rPr sz="4800" b="1">
                 <a:solidFill>
-                  <a:srgbClr val="F7F2E9"/>
+                  <a:srgbClr val="FAF7F0"/>
                 </a:solidFill>
                 <a:latin typeface="Georgia"/>
               </a:rPr>
@@ -4776,7 +4776,7 @@
             <a:avLst/>
           </a:prstGeom>
           <a:solidFill>
-            <a:srgbClr val="C07A1E"/>
+            <a:srgbClr val="D9622B"/>
           </a:solidFill>
           <a:ln>
             <a:noFill/>
@@ -4835,9 +4835,9 @@
             <a:r>
               <a:rPr sz="2400" b="0">
                 <a:solidFill>
-                  <a:srgbClr val="A8D88A"/>
-                </a:solidFill>
-                <a:latin typeface="Arial"/>
+                  <a:srgbClr val="FAF7F0"/>
+                </a:solidFill>
+                <a:latin typeface="Calibri"/>
               </a:rPr>
               <a:t>Walking With Farmers</a:t>
             </a:r>
@@ -4851,9 +4851,9 @@
             <a:r>
               <a:rPr sz="2400" b="0">
                 <a:solidFill>
-                  <a:srgbClr val="A8D88A"/>
-                </a:solidFill>
-                <a:latin typeface="Arial"/>
+                  <a:srgbClr val="FAF7F0"/>
+                </a:solidFill>
+                <a:latin typeface="Calibri"/>
               </a:rPr>
               <a:t>Day 2 of 3: the farm visit</a:t>
             </a:r>
@@ -4875,11 +4875,11 @@
             <a:avLst/>
           </a:prstGeom>
           <a:solidFill>
-            <a:srgbClr val="FBF6EC"/>
+            <a:srgbClr val="FAF7F0"/>
           </a:solidFill>
           <a:ln w="15875">
             <a:solidFill>
-              <a:srgbClr val="E2D8C4"/>
+              <a:srgbClr val="6E9CC4"/>
             </a:solidFill>
           </a:ln>
           <a:effectLst/>
@@ -4936,9 +4936,9 @@
             <a:r>
               <a:rPr sz="1200" b="1">
                 <a:solidFill>
-                  <a:srgbClr val="C07A1E"/>
-                </a:solidFill>
-                <a:latin typeface="Arial"/>
+                  <a:srgbClr val="D9622B"/>
+                </a:solidFill>
+                <a:latin typeface="Calibri"/>
               </a:rPr>
               <a:t>IMAGE · M-IMG-01 · coming</a:t>
             </a:r>
@@ -4975,7 +4975,7 @@
             <a:r>
               <a:rPr sz="1800" b="1">
                 <a:solidFill>
-                  <a:srgbClr val="1F4D2B"/>
+                  <a:srgbClr val="232323"/>
                 </a:solidFill>
                 <a:latin typeface="Georgia"/>
               </a:rPr>
@@ -5014,9 +5014,9 @@
             <a:r>
               <a:rPr sz="1100" b="0">
                 <a:solidFill>
-                  <a:srgbClr val="20190F"/>
-                </a:solidFill>
-                <a:latin typeface="Arial"/>
+                  <a:srgbClr val="232323"/>
+                </a:solidFill>
+                <a:latin typeface="Calibri"/>
               </a:rPr>
               <a:t>Cover image for all decks. Early morning; the mentor greets the farmer at a wire-and- dropper garden gate, both smiling, a vegetable garden behind with mulched beds and a JoJo-style tank beside a corrugated-iron roof. Sun low in the north-east, long shadows falling south-west. 16:9, 1920 × 1080, space on the left third for the slide title.</a:t>
             </a:r>
@@ -5037,7 +5037,7 @@
     <p:bg>
       <p:bgPr>
         <a:solidFill>
-          <a:srgbClr val="F7F2E9"/>
+          <a:srgbClr val="FAF7F0"/>
         </a:solidFill>
         <a:effectLst/>
       </p:bgPr>
@@ -5079,9 +5079,9 @@
             <a:r>
               <a:rPr sz="1000" b="0">
                 <a:solidFill>
-                  <a:srgbClr val="6B6255"/>
-                </a:solidFill>
-                <a:latin typeface="Arial"/>
+                  <a:srgbClr val="232323"/>
+                </a:solidFill>
+                <a:latin typeface="Calibri"/>
               </a:rPr>
               <a:t>M-D2-10   ·   Poster M-P11</a:t>
             </a:r>
@@ -5118,9 +5118,9 @@
             <a:r>
               <a:rPr sz="1000" b="0">
                 <a:solidFill>
-                  <a:srgbClr val="6B6255"/>
-                </a:solidFill>
-                <a:latin typeface="Arial"/>
+                  <a:srgbClr val="232323"/>
+                </a:solidFill>
+                <a:latin typeface="Calibri"/>
               </a:rPr>
               <a:t>Walking With Farmers</a:t>
             </a:r>
@@ -5157,7 +5157,7 @@
             <a:r>
               <a:rPr sz="3800" b="1">
                 <a:solidFill>
-                  <a:srgbClr val="1F4D2B"/>
+                  <a:srgbClr val="232323"/>
                 </a:solidFill>
                 <a:latin typeface="Georgia"/>
               </a:rPr>
@@ -5181,7 +5181,7 @@
             <a:avLst/>
           </a:prstGeom>
           <a:solidFill>
-            <a:srgbClr val="E2D8C4"/>
+            <a:srgbClr val="6E9CC4"/>
           </a:solidFill>
           <a:ln>
             <a:noFill/>
@@ -5240,9 +5240,9 @@
             <a:r>
               <a:rPr sz="2400" b="0">
                 <a:solidFill>
-                  <a:srgbClr val="20190F"/>
-                </a:solidFill>
-                <a:latin typeface="Arial"/>
+                  <a:srgbClr val="232323"/>
+                </a:solidFill>
+                <a:latin typeface="Calibri"/>
               </a:rPr>
               <a:t>•  Welcome · Host's tour · Try it</a:t>
             </a:r>
@@ -5256,9 +5256,9 @@
             <a:r>
               <a:rPr sz="2400" b="0">
                 <a:solidFill>
-                  <a:srgbClr val="20190F"/>
-                </a:solidFill>
-                <a:latin typeface="Arial"/>
+                  <a:srgbClr val="232323"/>
+                </a:solidFill>
+                <a:latin typeface="Calibri"/>
               </a:rPr>
               <a:t>•  Share circle · Everyone agrees one action</a:t>
             </a:r>
@@ -5280,11 +5280,11 @@
             <a:avLst/>
           </a:prstGeom>
           <a:solidFill>
-            <a:srgbClr val="FBF6EC"/>
+            <a:srgbClr val="FAF7F0"/>
           </a:solidFill>
           <a:ln w="15875">
             <a:solidFill>
-              <a:srgbClr val="E2D8C4"/>
+              <a:srgbClr val="6E9CC4"/>
             </a:solidFill>
           </a:ln>
           <a:effectLst/>
@@ -5341,9 +5341,9 @@
             <a:r>
               <a:rPr sz="1200" b="1">
                 <a:solidFill>
-                  <a:srgbClr val="C07A1E"/>
-                </a:solidFill>
-                <a:latin typeface="Arial"/>
+                  <a:srgbClr val="D9622B"/>
+                </a:solidFill>
+                <a:latin typeface="Calibri"/>
               </a:rPr>
               <a:t>POSTER ART · M-P11-ART · coming</a:t>
             </a:r>
@@ -5380,7 +5380,7 @@
             <a:r>
               <a:rPr sz="1800" b="1">
                 <a:solidFill>
-                  <a:srgbClr val="1F4D2B"/>
+                  <a:srgbClr val="232323"/>
                 </a:solidFill>
                 <a:latin typeface="Georgia"/>
               </a:rPr>
@@ -5419,9 +5419,9 @@
             <a:r>
               <a:rPr sz="1100" b="0">
                 <a:solidFill>
-                  <a:srgbClr val="20190F"/>
-                </a:solidFill>
-                <a:latin typeface="Arial"/>
+                  <a:srgbClr val="232323"/>
+                </a:solidFill>
+                <a:latin typeface="Calibri"/>
               </a:rPr>
               <a:t>A host farmer's garden with 10 farmers of mixed ages and genders. In one corner the host gogo leads a tour, pointing at a mulched bed; in the middle, three small groups of 3–4 kneeling at different stations (spacing string, seedling tray, a bucket); at the front, everyone sitting in a circle in the shade of a tree; the mentor sits in the circle, not…</a:t>
             </a:r>
@@ -5442,7 +5442,7 @@
     <p:bg>
       <p:bgPr>
         <a:solidFill>
-          <a:srgbClr val="F7F2E9"/>
+          <a:srgbClr val="FAF7F0"/>
         </a:solidFill>
         <a:effectLst/>
       </p:bgPr>
@@ -5484,9 +5484,9 @@
             <a:r>
               <a:rPr sz="1000" b="0">
                 <a:solidFill>
-                  <a:srgbClr val="6B6255"/>
-                </a:solidFill>
-                <a:latin typeface="Arial"/>
+                  <a:srgbClr val="232323"/>
+                </a:solidFill>
+                <a:latin typeface="Calibri"/>
               </a:rPr>
               <a:t>M-D2-11   ·   Poster M-P11</a:t>
             </a:r>
@@ -5523,9 +5523,9 @@
             <a:r>
               <a:rPr sz="1000" b="0">
                 <a:solidFill>
-                  <a:srgbClr val="6B6255"/>
-                </a:solidFill>
-                <a:latin typeface="Arial"/>
+                  <a:srgbClr val="232323"/>
+                </a:solidFill>
+                <a:latin typeface="Calibri"/>
               </a:rPr>
               <a:t>Walking With Farmers</a:t>
             </a:r>
@@ -5547,7 +5547,7 @@
             <a:avLst/>
           </a:prstGeom>
           <a:solidFill>
-            <a:srgbClr val="C07A1E"/>
+            <a:srgbClr val="D9622B"/>
           </a:solidFill>
           <a:ln>
             <a:noFill/>
@@ -5606,9 +5606,9 @@
             <a:r>
               <a:rPr sz="1400" b="1">
                 <a:solidFill>
-                  <a:srgbClr val="F7F2E9"/>
-                </a:solidFill>
-                <a:latin typeface="Arial"/>
+                  <a:srgbClr val="FAF7F0"/>
+                </a:solidFill>
+                <a:latin typeface="Calibri"/>
               </a:rPr>
               <a:t>YOUR TURN</a:t>
             </a:r>
@@ -5645,7 +5645,7 @@
             <a:r>
               <a:rPr sz="3800" b="1">
                 <a:solidFill>
-                  <a:srgbClr val="1F4D2B"/>
+                  <a:srgbClr val="232323"/>
                 </a:solidFill>
                 <a:latin typeface="Georgia"/>
               </a:rPr>
@@ -5669,7 +5669,7 @@
             <a:avLst/>
           </a:prstGeom>
           <a:solidFill>
-            <a:srgbClr val="E2D8C4"/>
+            <a:srgbClr val="6E9CC4"/>
           </a:solidFill>
           <a:ln>
             <a:noFill/>
@@ -5728,9 +5728,9 @@
             <a:r>
               <a:rPr sz="3000" b="1">
                 <a:solidFill>
-                  <a:srgbClr val="20190F"/>
-                </a:solidFill>
-                <a:latin typeface="Arial"/>
+                  <a:srgbClr val="232323"/>
+                </a:solidFill>
+                <a:latin typeface="Calibri"/>
               </a:rPr>
               <a:t>•  3 stations · 8 minutes each</a:t>
             </a:r>
@@ -5744,9 +5744,9 @@
             <a:r>
               <a:rPr sz="3000" b="1">
                 <a:solidFill>
-                  <a:srgbClr val="20190F"/>
-                </a:solidFill>
-                <a:latin typeface="Arial"/>
+                  <a:srgbClr val="232323"/>
+                </a:solidFill>
+                <a:latin typeface="Calibri"/>
               </a:rPr>
               <a:t>•  Farmers answer farmers first</a:t>
             </a:r>
@@ -5792,7 +5792,7 @@
             <a:avLst/>
           </a:prstGeom>
           <a:solidFill>
-            <a:srgbClr val="20190F"/>
+            <a:srgbClr val="232323"/>
           </a:solidFill>
           <a:ln>
             <a:noFill/>
@@ -5851,9 +5851,9 @@
             <a:r>
               <a:rPr sz="1100" b="0">
                 <a:solidFill>
-                  <a:srgbClr val="F7F2E9"/>
-                </a:solidFill>
-                <a:latin typeface="Arial"/>
+                  <a:srgbClr val="FAF7F0"/>
+                </a:solidFill>
+                <a:latin typeface="Calibri"/>
               </a:rPr>
               <a:t>▶  Clip M-ANI-09 · play from the tablet: flow-seed-sharing.mp4</a:t>
             </a:r>
@@ -5874,7 +5874,7 @@
     <p:bg>
       <p:bgPr>
         <a:solidFill>
-          <a:srgbClr val="F7F2E9"/>
+          <a:srgbClr val="FAF7F0"/>
         </a:solidFill>
         <a:effectLst/>
       </p:bgPr>
@@ -5916,9 +5916,9 @@
             <a:r>
               <a:rPr sz="1000" b="0">
                 <a:solidFill>
-                  <a:srgbClr val="6B6255"/>
-                </a:solidFill>
-                <a:latin typeface="Arial"/>
+                  <a:srgbClr val="232323"/>
+                </a:solidFill>
+                <a:latin typeface="Calibri"/>
               </a:rPr>
               <a:t>M-D2-12   ·   Poster M-P11</a:t>
             </a:r>
@@ -5955,9 +5955,9 @@
             <a:r>
               <a:rPr sz="1000" b="0">
                 <a:solidFill>
-                  <a:srgbClr val="6B6255"/>
-                </a:solidFill>
-                <a:latin typeface="Arial"/>
+                  <a:srgbClr val="232323"/>
+                </a:solidFill>
+                <a:latin typeface="Calibri"/>
               </a:rPr>
               <a:t>Walking With Farmers</a:t>
             </a:r>
@@ -5994,7 +5994,7 @@
             <a:r>
               <a:rPr sz="3800" b="1">
                 <a:solidFill>
-                  <a:srgbClr val="1F4D2B"/>
+                  <a:srgbClr val="232323"/>
                 </a:solidFill>
                 <a:latin typeface="Georgia"/>
               </a:rPr>
@@ -6018,7 +6018,7 @@
             <a:avLst/>
           </a:prstGeom>
           <a:solidFill>
-            <a:srgbClr val="E2D8C4"/>
+            <a:srgbClr val="6E9CC4"/>
           </a:solidFill>
           <a:ln>
             <a:noFill/>
@@ -6077,9 +6077,9 @@
             <a:r>
               <a:rPr sz="2800" b="0">
                 <a:solidFill>
-                  <a:srgbClr val="20190F"/>
-                </a:solidFill>
-                <a:latin typeface="Arial"/>
+                  <a:srgbClr val="232323"/>
+                </a:solidFill>
+                <a:latin typeface="Calibri"/>
               </a:rPr>
               <a:t>•  Same soil, same rain</a:t>
             </a:r>
@@ -6093,9 +6093,9 @@
             <a:r>
               <a:rPr sz="2800" b="0">
                 <a:solidFill>
-                  <a:srgbClr val="20190F"/>
-                </a:solidFill>
-                <a:latin typeface="Arial"/>
+                  <a:srgbClr val="232323"/>
+                </a:solidFill>
+                <a:latin typeface="Calibri"/>
               </a:rPr>
               <a:t>•  Seeing is believing</a:t>
             </a:r>
@@ -6109,9 +6109,9 @@
             <a:r>
               <a:rPr sz="2800" b="0">
                 <a:solidFill>
-                  <a:srgbClr val="20190F"/>
-                </a:solidFill>
-                <a:latin typeface="Arial"/>
+                  <a:srgbClr val="232323"/>
+                </a:solidFill>
+                <a:latin typeface="Calibri"/>
               </a:rPr>
               <a:t>•  Rotate the host</a:t>
             </a:r>
@@ -6132,7 +6132,7 @@
     <p:bg>
       <p:bgPr>
         <a:solidFill>
-          <a:srgbClr val="F7F2E9"/>
+          <a:srgbClr val="FAF7F0"/>
         </a:solidFill>
         <a:effectLst/>
       </p:bgPr>
@@ -6174,9 +6174,9 @@
             <a:r>
               <a:rPr sz="1000" b="0">
                 <a:solidFill>
-                  <a:srgbClr val="6B6255"/>
-                </a:solidFill>
-                <a:latin typeface="Arial"/>
+                  <a:srgbClr val="232323"/>
+                </a:solidFill>
+                <a:latin typeface="Calibri"/>
               </a:rPr>
               <a:t>M-D2-13   ·   Poster M-P07</a:t>
             </a:r>
@@ -6213,9 +6213,9 @@
             <a:r>
               <a:rPr sz="1000" b="0">
                 <a:solidFill>
-                  <a:srgbClr val="6B6255"/>
-                </a:solidFill>
-                <a:latin typeface="Arial"/>
+                  <a:srgbClr val="232323"/>
+                </a:solidFill>
+                <a:latin typeface="Calibri"/>
               </a:rPr>
               <a:t>Walking With Farmers</a:t>
             </a:r>
@@ -6237,7 +6237,7 @@
             <a:avLst/>
           </a:prstGeom>
           <a:solidFill>
-            <a:srgbClr val="C07A1E"/>
+            <a:srgbClr val="D9622B"/>
           </a:solidFill>
           <a:ln>
             <a:noFill/>
@@ -6296,9 +6296,9 @@
             <a:r>
               <a:rPr sz="1400" b="1">
                 <a:solidFill>
-                  <a:srgbClr val="F7F2E9"/>
-                </a:solidFill>
-                <a:latin typeface="Arial"/>
+                  <a:srgbClr val="FAF7F0"/>
+                </a:solidFill>
+                <a:latin typeface="Calibri"/>
               </a:rPr>
               <a:t>YOUR TURN</a:t>
             </a:r>
@@ -6335,7 +6335,7 @@
             <a:r>
               <a:rPr sz="3800" b="1">
                 <a:solidFill>
-                  <a:srgbClr val="1F4D2B"/>
+                  <a:srgbClr val="232323"/>
                 </a:solidFill>
                 <a:latin typeface="Georgia"/>
               </a:rPr>
@@ -6359,7 +6359,7 @@
             <a:avLst/>
           </a:prstGeom>
           <a:solidFill>
-            <a:srgbClr val="E2D8C4"/>
+            <a:srgbClr val="6E9CC4"/>
           </a:solidFill>
           <a:ln>
             <a:noFill/>
@@ -6418,9 +6418,9 @@
             <a:r>
               <a:rPr sz="2600" b="1">
                 <a:solidFill>
-                  <a:srgbClr val="20190F"/>
-                </a:solidFill>
-                <a:latin typeface="Arial"/>
+                  <a:srgbClr val="232323"/>
+                </a:solidFill>
+                <a:latin typeface="Calibri"/>
               </a:rPr>
               <a:t>•  Mentor first · then Observer · then Recorder</a:t>
             </a:r>
@@ -6434,9 +6434,9 @@
             <a:r>
               <a:rPr sz="2600" b="1">
                 <a:solidFill>
-                  <a:srgbClr val="20190F"/>
-                </a:solidFill>
-                <a:latin typeface="Arial"/>
+                  <a:srgbClr val="232323"/>
+                </a:solidFill>
+                <a:latin typeface="Calibri"/>
               </a:rPr>
               <a:t>•  Two stars and a wish</a:t>
             </a:r>
@@ -6458,11 +6458,11 @@
             <a:avLst/>
           </a:prstGeom>
           <a:solidFill>
-            <a:srgbClr val="FBF6EC"/>
+            <a:srgbClr val="FAF7F0"/>
           </a:solidFill>
           <a:ln w="15875">
             <a:solidFill>
-              <a:srgbClr val="E2D8C4"/>
+              <a:srgbClr val="6E9CC4"/>
             </a:solidFill>
           </a:ln>
           <a:effectLst/>
@@ -6519,9 +6519,9 @@
             <a:r>
               <a:rPr sz="1200" b="1">
                 <a:solidFill>
-                  <a:srgbClr val="C07A1E"/>
-                </a:solidFill>
-                <a:latin typeface="Arial"/>
+                  <a:srgbClr val="D9622B"/>
+                </a:solidFill>
+                <a:latin typeface="Calibri"/>
               </a:rPr>
               <a:t>IMAGE · M-IMG-05 · coming</a:t>
             </a:r>
@@ -6558,7 +6558,7 @@
             <a:r>
               <a:rPr sz="1800" b="1">
                 <a:solidFill>
-                  <a:srgbClr val="1F4D2B"/>
+                  <a:srgbClr val="232323"/>
                 </a:solidFill>
                 <a:latin typeface="Georgia"/>
               </a:rPr>
@@ -6597,9 +6597,9 @@
             <a:r>
               <a:rPr sz="1100" b="0">
                 <a:solidFill>
-                  <a:srgbClr val="20190F"/>
-                </a:solidFill>
-                <a:latin typeface="Arial"/>
+                  <a:srgbClr val="232323"/>
+                </a:solidFill>
+                <a:latin typeface="Calibri"/>
               </a:rPr>
               <a:t>In a garden: the mentor and the gogo kneel planting seedlings together (the gogo's hands on the plant); a recorder writes in a notebook nearby; an observer stands 3 m back with a clipboard, watching the gogo's face. 16:9.</a:t>
             </a:r>
@@ -6620,7 +6620,7 @@
     <p:bg>
       <p:bgPr>
         <a:solidFill>
-          <a:srgbClr val="F7F2E9"/>
+          <a:srgbClr val="FAF7F0"/>
         </a:solidFill>
         <a:effectLst/>
       </p:bgPr>
@@ -6662,9 +6662,9 @@
             <a:r>
               <a:rPr sz="1000" b="0">
                 <a:solidFill>
-                  <a:srgbClr val="6B6255"/>
-                </a:solidFill>
-                <a:latin typeface="Arial"/>
+                  <a:srgbClr val="232323"/>
+                </a:solidFill>
+                <a:latin typeface="Calibri"/>
               </a:rPr>
               <a:t>M-D2-14   ·   Poster M-P07</a:t>
             </a:r>
@@ -6701,9 +6701,9 @@
             <a:r>
               <a:rPr sz="1000" b="0">
                 <a:solidFill>
-                  <a:srgbClr val="6B6255"/>
-                </a:solidFill>
-                <a:latin typeface="Arial"/>
+                  <a:srgbClr val="232323"/>
+                </a:solidFill>
+                <a:latin typeface="Calibri"/>
               </a:rPr>
               <a:t>Walking With Farmers</a:t>
             </a:r>
@@ -6725,7 +6725,7 @@
             <a:avLst/>
           </a:prstGeom>
           <a:solidFill>
-            <a:srgbClr val="C07A1E"/>
+            <a:srgbClr val="D9622B"/>
           </a:solidFill>
           <a:ln>
             <a:noFill/>
@@ -6784,9 +6784,9 @@
             <a:r>
               <a:rPr sz="1400" b="1">
                 <a:solidFill>
-                  <a:srgbClr val="F7F2E9"/>
-                </a:solidFill>
-                <a:latin typeface="Arial"/>
+                  <a:srgbClr val="FAF7F0"/>
+                </a:solidFill>
+                <a:latin typeface="Calibri"/>
               </a:rPr>
               <a:t>YOUR TURN</a:t>
             </a:r>
@@ -6823,7 +6823,7 @@
             <a:r>
               <a:rPr sz="3800" b="1">
                 <a:solidFill>
-                  <a:srgbClr val="1F4D2B"/>
+                  <a:srgbClr val="232323"/>
                 </a:solidFill>
                 <a:latin typeface="Georgia"/>
               </a:rPr>
@@ -6847,7 +6847,7 @@
             <a:avLst/>
           </a:prstGeom>
           <a:solidFill>
-            <a:srgbClr val="E2D8C4"/>
+            <a:srgbClr val="6E9CC4"/>
           </a:solidFill>
           <a:ln>
             <a:noFill/>
@@ -6906,9 +6906,9 @@
             <a:r>
               <a:rPr sz="3000" b="1">
                 <a:solidFill>
-                  <a:srgbClr val="20190F"/>
-                </a:solidFill>
-                <a:latin typeface="Arial"/>
+                  <a:srgbClr val="232323"/>
+                </a:solidFill>
+                <a:latin typeface="Calibri"/>
               </a:rPr>
               <a:t>•  Green dot: our best finger</a:t>
             </a:r>
@@ -6922,9 +6922,9 @@
             <a:r>
               <a:rPr sz="3000" b="1">
                 <a:solidFill>
-                  <a:srgbClr val="20190F"/>
-                </a:solidFill>
-                <a:latin typeface="Arial"/>
+                  <a:srgbClr val="232323"/>
+                </a:solidFill>
+                <a:latin typeface="Calibri"/>
               </a:rPr>
               <a:t>•  Ochre dot: our hardest finger</a:t>
             </a:r>
@@ -6945,7 +6945,7 @@
     <p:bg>
       <p:bgPr>
         <a:solidFill>
-          <a:srgbClr val="F7F2E9"/>
+          <a:srgbClr val="FAF7F0"/>
         </a:solidFill>
         <a:effectLst/>
       </p:bgPr>
@@ -6987,9 +6987,9 @@
             <a:r>
               <a:rPr sz="1000" b="0">
                 <a:solidFill>
-                  <a:srgbClr val="6B6255"/>
-                </a:solidFill>
-                <a:latin typeface="Arial"/>
+                  <a:srgbClr val="232323"/>
+                </a:solidFill>
+                <a:latin typeface="Calibri"/>
               </a:rPr>
               <a:t>M-D2-15   ·   Poster M-P06</a:t>
             </a:r>
@@ -7026,9 +7026,9 @@
             <a:r>
               <a:rPr sz="1000" b="0">
                 <a:solidFill>
-                  <a:srgbClr val="6B6255"/>
-                </a:solidFill>
-                <a:latin typeface="Arial"/>
+                  <a:srgbClr val="232323"/>
+                </a:solidFill>
+                <a:latin typeface="Calibri"/>
               </a:rPr>
               <a:t>Walking With Farmers</a:t>
             </a:r>
@@ -7065,7 +7065,7 @@
             <a:r>
               <a:rPr sz="3800" b="1">
                 <a:solidFill>
-                  <a:srgbClr val="1F4D2B"/>
+                  <a:srgbClr val="232323"/>
                 </a:solidFill>
                 <a:latin typeface="Georgia"/>
               </a:rPr>
@@ -7089,7 +7089,7 @@
             <a:avLst/>
           </a:prstGeom>
           <a:solidFill>
-            <a:srgbClr val="E2D8C4"/>
+            <a:srgbClr val="6E9CC4"/>
           </a:solidFill>
           <a:ln>
             <a:noFill/>
@@ -7148,9 +7148,9 @@
             <a:r>
               <a:rPr sz="2800" b="0">
                 <a:solidFill>
-                  <a:srgbClr val="20190F"/>
-                </a:solidFill>
-                <a:latin typeface="Arial"/>
+                  <a:srgbClr val="232323"/>
+                </a:solidFill>
+                <a:latin typeface="Calibri"/>
               </a:rPr>
               <a:t>•  The farmer talks more than half</a:t>
             </a:r>
@@ -7164,9 +7164,9 @@
             <a:r>
               <a:rPr sz="2800" b="0">
                 <a:solidFill>
-                  <a:srgbClr val="20190F"/>
-                </a:solidFill>
-                <a:latin typeface="Arial"/>
+                  <a:srgbClr val="232323"/>
+                </a:solidFill>
+                <a:latin typeface="Calibri"/>
               </a:rPr>
               <a:t>•  Ask a buddy to observe you monthly</a:t>
             </a:r>
@@ -7187,7 +7187,7 @@
     <p:bg>
       <p:bgPr>
         <a:solidFill>
-          <a:srgbClr val="F7F2E9"/>
+          <a:srgbClr val="FAF7F0"/>
         </a:solidFill>
         <a:effectLst/>
       </p:bgPr>
@@ -7229,9 +7229,9 @@
             <a:r>
               <a:rPr sz="1000" b="0">
                 <a:solidFill>
-                  <a:srgbClr val="6B6255"/>
-                </a:solidFill>
-                <a:latin typeface="Arial"/>
+                  <a:srgbClr val="232323"/>
+                </a:solidFill>
+                <a:latin typeface="Calibri"/>
               </a:rPr>
               <a:t>M-D2-02   ·   Poster M-P07</a:t>
             </a:r>
@@ -7268,9 +7268,9 @@
             <a:r>
               <a:rPr sz="1000" b="0">
                 <a:solidFill>
-                  <a:srgbClr val="6B6255"/>
-                </a:solidFill>
-                <a:latin typeface="Arial"/>
+                  <a:srgbClr val="232323"/>
+                </a:solidFill>
+                <a:latin typeface="Calibri"/>
               </a:rPr>
               <a:t>Walking With Farmers</a:t>
             </a:r>
@@ -7307,7 +7307,7 @@
             <a:r>
               <a:rPr sz="3800" b="1">
                 <a:solidFill>
-                  <a:srgbClr val="1F4D2B"/>
+                  <a:srgbClr val="232323"/>
                 </a:solidFill>
                 <a:latin typeface="Georgia"/>
               </a:rPr>
@@ -7331,7 +7331,7 @@
             <a:avLst/>
           </a:prstGeom>
           <a:solidFill>
-            <a:srgbClr val="E2D8C4"/>
+            <a:srgbClr val="6E9CC4"/>
           </a:solidFill>
           <a:ln>
             <a:noFill/>
@@ -7390,9 +7390,9 @@
             <a:r>
               <a:rPr sz="2800" b="0">
                 <a:solidFill>
-                  <a:srgbClr val="20190F"/>
-                </a:solidFill>
-                <a:latin typeface="Arial"/>
+                  <a:srgbClr val="232323"/>
+                </a:solidFill>
+                <a:latin typeface="Calibri"/>
               </a:rPr>
               <a:t>•  Look back · Walk &amp; look</a:t>
             </a:r>
@@ -7406,9 +7406,9 @@
             <a:r>
               <a:rPr sz="2800" b="0">
                 <a:solidFill>
-                  <a:srgbClr val="20190F"/>
-                </a:solidFill>
-                <a:latin typeface="Arial"/>
+                  <a:srgbClr val="232323"/>
+                </a:solidFill>
+                <a:latin typeface="Calibri"/>
               </a:rPr>
               <a:t>•  Listen &amp; ask · Try it together</a:t>
             </a:r>
@@ -7422,9 +7422,9 @@
             <a:r>
               <a:rPr sz="2800" b="0">
                 <a:solidFill>
-                  <a:srgbClr val="20190F"/>
-                </a:solidFill>
-                <a:latin typeface="Arial"/>
+                  <a:srgbClr val="232323"/>
+                </a:solidFill>
+                <a:latin typeface="Calibri"/>
               </a:rPr>
               <a:t>•  Agree &amp; record</a:t>
             </a:r>
@@ -7446,11 +7446,11 @@
             <a:avLst/>
           </a:prstGeom>
           <a:solidFill>
-            <a:srgbClr val="FBF6EC"/>
+            <a:srgbClr val="FAF7F0"/>
           </a:solidFill>
           <a:ln w="15875">
             <a:solidFill>
-              <a:srgbClr val="E2D8C4"/>
+              <a:srgbClr val="6E9CC4"/>
             </a:solidFill>
           </a:ln>
           <a:effectLst/>
@@ -7507,9 +7507,9 @@
             <a:r>
               <a:rPr sz="1200" b="1">
                 <a:solidFill>
-                  <a:srgbClr val="C07A1E"/>
-                </a:solidFill>
-                <a:latin typeface="Arial"/>
+                  <a:srgbClr val="D9622B"/>
+                </a:solidFill>
+                <a:latin typeface="Calibri"/>
               </a:rPr>
               <a:t>POSTER ART · M-P07-ART · coming</a:t>
             </a:r>
@@ -7546,7 +7546,7 @@
             <a:r>
               <a:rPr sz="1800" b="1">
                 <a:solidFill>
-                  <a:srgbClr val="1F4D2B"/>
+                  <a:srgbClr val="232323"/>
                 </a:solidFill>
                 <a:latin typeface="Georgia"/>
               </a:rPr>
@@ -7585,9 +7585,9 @@
             <a:r>
               <a:rPr sz="1100" b="0">
                 <a:solidFill>
-                  <a:srgbClr val="20190F"/>
-                </a:solidFill>
-                <a:latin typeface="Arial"/>
+                  <a:srgbClr val="232323"/>
+                </a:solidFill>
+                <a:latin typeface="Calibri"/>
               </a:rPr>
               <a:t>A large open hand (brown skin tone, palm towards viewer, fingers spread). In each fingertip a small round scene: thumb — mentor and farmer looking at a mulched bed together (look back); pointing finger — the pair walking between beds, farmer pointing; middle finger (tallest) — the pair sitting in shade talking; ring finger — both kneeling, farmer's hands…</a:t>
             </a:r>
@@ -7608,7 +7608,7 @@
     <p:bg>
       <p:bgPr>
         <a:solidFill>
-          <a:srgbClr val="F7F2E9"/>
+          <a:srgbClr val="FAF7F0"/>
         </a:solidFill>
         <a:effectLst/>
       </p:bgPr>
@@ -7650,9 +7650,9 @@
             <a:r>
               <a:rPr sz="1000" b="0">
                 <a:solidFill>
-                  <a:srgbClr val="6B6255"/>
-                </a:solidFill>
-                <a:latin typeface="Arial"/>
+                  <a:srgbClr val="232323"/>
+                </a:solidFill>
+                <a:latin typeface="Calibri"/>
               </a:rPr>
               <a:t>M-D2-03   ·   Poster M-P07</a:t>
             </a:r>
@@ -7689,9 +7689,9 @@
             <a:r>
               <a:rPr sz="1000" b="0">
                 <a:solidFill>
-                  <a:srgbClr val="6B6255"/>
-                </a:solidFill>
-                <a:latin typeface="Arial"/>
+                  <a:srgbClr val="232323"/>
+                </a:solidFill>
+                <a:latin typeface="Calibri"/>
               </a:rPr>
               <a:t>Walking With Farmers</a:t>
             </a:r>
@@ -7728,7 +7728,7 @@
             <a:r>
               <a:rPr sz="3800" b="1">
                 <a:solidFill>
-                  <a:srgbClr val="1F4D2B"/>
+                  <a:srgbClr val="232323"/>
                 </a:solidFill>
                 <a:latin typeface="Georgia"/>
               </a:rPr>
@@ -7752,7 +7752,7 @@
             <a:avLst/>
           </a:prstGeom>
           <a:solidFill>
-            <a:srgbClr val="E2D8C4"/>
+            <a:srgbClr val="6E9CC4"/>
           </a:solidFill>
           <a:ln>
             <a:noFill/>
@@ -7811,9 +7811,9 @@
             <a:r>
               <a:rPr sz="2800" b="0">
                 <a:solidFill>
-                  <a:srgbClr val="20190F"/>
-                </a:solidFill>
-                <a:latin typeface="Arial"/>
+                  <a:srgbClr val="232323"/>
+                </a:solidFill>
+                <a:latin typeface="Calibri"/>
               </a:rPr>
               <a:t>•  10 · 15 · 10 · 15 · 10 minutes</a:t>
             </a:r>
@@ -7827,9 +7827,9 @@
             <a:r>
               <a:rPr sz="2800" b="0">
                 <a:solidFill>
-                  <a:srgbClr val="20190F"/>
-                </a:solidFill>
-                <a:latin typeface="Arial"/>
+                  <a:srgbClr val="232323"/>
+                </a:solidFill>
+                <a:latin typeface="Calibri"/>
               </a:rPr>
               <a:t>•  Never cut ring or little finger</a:t>
             </a:r>
@@ -7850,7 +7850,7 @@
     <p:bg>
       <p:bgPr>
         <a:solidFill>
-          <a:srgbClr val="F7F2E9"/>
+          <a:srgbClr val="FAF7F0"/>
         </a:solidFill>
         <a:effectLst/>
       </p:bgPr>
@@ -7892,9 +7892,9 @@
             <a:r>
               <a:rPr sz="1000" b="0">
                 <a:solidFill>
-                  <a:srgbClr val="6B6255"/>
-                </a:solidFill>
-                <a:latin typeface="Arial"/>
+                  <a:srgbClr val="232323"/>
+                </a:solidFill>
+                <a:latin typeface="Calibri"/>
               </a:rPr>
               <a:t>M-D2-04   ·   Poster M-P07</a:t>
             </a:r>
@@ -7931,9 +7931,9 @@
             <a:r>
               <a:rPr sz="1000" b="0">
                 <a:solidFill>
-                  <a:srgbClr val="6B6255"/>
-                </a:solidFill>
-                <a:latin typeface="Arial"/>
+                  <a:srgbClr val="232323"/>
+                </a:solidFill>
+                <a:latin typeface="Calibri"/>
               </a:rPr>
               <a:t>Walking With Farmers</a:t>
             </a:r>
@@ -7955,7 +7955,7 @@
             <a:avLst/>
           </a:prstGeom>
           <a:solidFill>
-            <a:srgbClr val="C07A1E"/>
+            <a:srgbClr val="D9622B"/>
           </a:solidFill>
           <a:ln>
             <a:noFill/>
@@ -8014,9 +8014,9 @@
             <a:r>
               <a:rPr sz="1400" b="1">
                 <a:solidFill>
-                  <a:srgbClr val="F7F2E9"/>
-                </a:solidFill>
-                <a:latin typeface="Arial"/>
+                  <a:srgbClr val="FAF7F0"/>
+                </a:solidFill>
+                <a:latin typeface="Calibri"/>
               </a:rPr>
               <a:t>YOUR TURN</a:t>
             </a:r>
@@ -8053,7 +8053,7 @@
             <a:r>
               <a:rPr sz="3800" b="1">
                 <a:solidFill>
-                  <a:srgbClr val="1F4D2B"/>
+                  <a:srgbClr val="232323"/>
                 </a:solidFill>
                 <a:latin typeface="Georgia"/>
               </a:rPr>
@@ -8077,7 +8077,7 @@
             <a:avLst/>
           </a:prstGeom>
           <a:solidFill>
-            <a:srgbClr val="E2D8C4"/>
+            <a:srgbClr val="6E9CC4"/>
           </a:solidFill>
           <a:ln>
             <a:noFill/>
@@ -8136,9 +8136,9 @@
             <a:r>
               <a:rPr sz="3000" b="1">
                 <a:solidFill>
-                  <a:srgbClr val="20190F"/>
-                </a:solidFill>
-                <a:latin typeface="Arial"/>
+                  <a:srgbClr val="232323"/>
+                </a:solidFill>
+                <a:latin typeface="Calibri"/>
               </a:rPr>
               <a:t>•  Pairs · 10 minutes</a:t>
             </a:r>
@@ -8152,9 +8152,9 @@
             <a:r>
               <a:rPr sz="3000" b="1">
                 <a:solidFill>
-                  <a:srgbClr val="20190F"/>
-                </a:solidFill>
-                <a:latin typeface="Arial"/>
+                  <a:srgbClr val="232323"/>
+                </a:solidFill>
+                <a:latin typeface="Calibri"/>
               </a:rPr>
               <a:t>•  2 minutes per finger</a:t>
             </a:r>
@@ -8200,7 +8200,7 @@
             <a:avLst/>
           </a:prstGeom>
           <a:solidFill>
-            <a:srgbClr val="20190F"/>
+            <a:srgbClr val="232323"/>
           </a:solidFill>
           <a:ln>
             <a:noFill/>
@@ -8259,9 +8259,9 @@
             <a:r>
               <a:rPr sz="1100" b="0">
                 <a:solidFill>
-                  <a:srgbClr val="F7F2E9"/>
-                </a:solidFill>
-                <a:latin typeface="Arial"/>
+                  <a:srgbClr val="FAF7F0"/>
+                </a:solidFill>
+                <a:latin typeface="Calibri"/>
               </a:rPr>
               <a:t>▶  Clip M-ANI-07 · play from the tablet: tour-soil-observation.mp4</a:t>
             </a:r>
@@ -8282,7 +8282,7 @@
     <p:bg>
       <p:bgPr>
         <a:solidFill>
-          <a:srgbClr val="F7F2E9"/>
+          <a:srgbClr val="FAF7F0"/>
         </a:solidFill>
         <a:effectLst/>
       </p:bgPr>
@@ -8324,9 +8324,9 @@
             <a:r>
               <a:rPr sz="1000" b="0">
                 <a:solidFill>
-                  <a:srgbClr val="6B6255"/>
-                </a:solidFill>
-                <a:latin typeface="Arial"/>
+                  <a:srgbClr val="232323"/>
+                </a:solidFill>
+                <a:latin typeface="Calibri"/>
               </a:rPr>
               <a:t>M-D2-05   ·   Poster M-P08</a:t>
             </a:r>
@@ -8363,9 +8363,9 @@
             <a:r>
               <a:rPr sz="1000" b="0">
                 <a:solidFill>
-                  <a:srgbClr val="6B6255"/>
-                </a:solidFill>
-                <a:latin typeface="Arial"/>
+                  <a:srgbClr val="232323"/>
+                </a:solidFill>
+                <a:latin typeface="Calibri"/>
               </a:rPr>
               <a:t>Walking With Farmers</a:t>
             </a:r>
@@ -8402,7 +8402,7 @@
             <a:r>
               <a:rPr sz="3800" b="1">
                 <a:solidFill>
-                  <a:srgbClr val="1F4D2B"/>
+                  <a:srgbClr val="232323"/>
                 </a:solidFill>
                 <a:latin typeface="Georgia"/>
               </a:rPr>
@@ -8426,7 +8426,7 @@
             <a:avLst/>
           </a:prstGeom>
           <a:solidFill>
-            <a:srgbClr val="E2D8C4"/>
+            <a:srgbClr val="6E9CC4"/>
           </a:solidFill>
           <a:ln>
             <a:noFill/>
@@ -8485,9 +8485,9 @@
             <a:r>
               <a:rPr sz="2800" b="0">
                 <a:solidFill>
-                  <a:srgbClr val="20190F"/>
-                </a:solidFill>
-                <a:latin typeface="Arial"/>
+                  <a:srgbClr val="232323"/>
+                </a:solidFill>
+                <a:latin typeface="Calibri"/>
               </a:rPr>
               <a:t>•  Baseline · planting · growth</a:t>
             </a:r>
@@ -8501,9 +8501,9 @@
             <a:r>
               <a:rPr sz="2800" b="0">
                 <a:solidFill>
-                  <a:srgbClr val="20190F"/>
-                </a:solidFill>
-                <a:latin typeface="Arial"/>
+                  <a:srgbClr val="232323"/>
+                </a:solidFill>
+                <a:latin typeface="Calibri"/>
               </a:rPr>
               <a:t>•  Harvest · selling · review</a:t>
             </a:r>
@@ -8517,9 +8517,9 @@
             <a:r>
               <a:rPr sz="2800" b="0">
                 <a:solidFill>
-                  <a:srgbClr val="20190F"/>
-                </a:solidFill>
-                <a:latin typeface="Arial"/>
+                  <a:srgbClr val="232323"/>
+                </a:solidFill>
+                <a:latin typeface="Calibri"/>
               </a:rPr>
               <a:t>•  Pick 3–5 checks</a:t>
             </a:r>
@@ -8541,11 +8541,11 @@
             <a:avLst/>
           </a:prstGeom>
           <a:solidFill>
-            <a:srgbClr val="FBF6EC"/>
+            <a:srgbClr val="FAF7F0"/>
           </a:solidFill>
           <a:ln w="15875">
             <a:solidFill>
-              <a:srgbClr val="E2D8C4"/>
+              <a:srgbClr val="6E9CC4"/>
             </a:solidFill>
           </a:ln>
           <a:effectLst/>
@@ -8602,9 +8602,9 @@
             <a:r>
               <a:rPr sz="1200" b="1">
                 <a:solidFill>
-                  <a:srgbClr val="C07A1E"/>
-                </a:solidFill>
-                <a:latin typeface="Arial"/>
+                  <a:srgbClr val="D9622B"/>
+                </a:solidFill>
+                <a:latin typeface="Calibri"/>
               </a:rPr>
               <a:t>POSTER ART · M-P08-ART · coming</a:t>
             </a:r>
@@ -8641,7 +8641,7 @@
             <a:r>
               <a:rPr sz="1800" b="1">
                 <a:solidFill>
-                  <a:srgbClr val="1F4D2B"/>
+                  <a:srgbClr val="232323"/>
                 </a:solidFill>
                 <a:latin typeface="Georgia"/>
               </a:rPr>
@@ -8680,9 +8680,9 @@
             <a:r>
               <a:rPr sz="1100" b="0">
                 <a:solidFill>
-                  <a:srgbClr val="20190F"/>
-                </a:solidFill>
-                <a:latin typeface="Arial"/>
+                  <a:srgbClr val="232323"/>
+                </a:solidFill>
+                <a:latin typeface="Calibri"/>
               </a:rPr>
               <a:t>One garden drawn six times in a row, left to right, as it changes over a season: (1) boundary pegged, beds marked, drum at the roof; (2) beds planted with a spacing string laid along one row, seedlings in a tray, mulch; (3) plants growing, a person checking under leaves, a bucket of liquid manure; (4) harvest basket on a hanging scale, a family plate;…</a:t>
             </a:r>
@@ -8703,7 +8703,7 @@
     <p:bg>
       <p:bgPr>
         <a:solidFill>
-          <a:srgbClr val="F7F2E9"/>
+          <a:srgbClr val="FAF7F0"/>
         </a:solidFill>
         <a:effectLst/>
       </p:bgPr>
@@ -8745,9 +8745,9 @@
             <a:r>
               <a:rPr sz="1000" b="0">
                 <a:solidFill>
-                  <a:srgbClr val="6B6255"/>
-                </a:solidFill>
-                <a:latin typeface="Arial"/>
+                  <a:srgbClr val="232323"/>
+                </a:solidFill>
+                <a:latin typeface="Calibri"/>
               </a:rPr>
               <a:t>M-D2-06   ·   Poster M-P14</a:t>
             </a:r>
@@ -8784,9 +8784,9 @@
             <a:r>
               <a:rPr sz="1000" b="0">
                 <a:solidFill>
-                  <a:srgbClr val="6B6255"/>
-                </a:solidFill>
-                <a:latin typeface="Arial"/>
+                  <a:srgbClr val="232323"/>
+                </a:solidFill>
+                <a:latin typeface="Calibri"/>
               </a:rPr>
               <a:t>Walking With Farmers</a:t>
             </a:r>
@@ -8808,7 +8808,7 @@
             <a:avLst/>
           </a:prstGeom>
           <a:solidFill>
-            <a:srgbClr val="235E86"/>
+            <a:srgbClr val="6E9CC4"/>
           </a:solidFill>
           <a:ln>
             <a:noFill/>
@@ -8867,9 +8867,9 @@
             <a:r>
               <a:rPr sz="1200" b="1">
                 <a:solidFill>
-                  <a:srgbClr val="F7F2E9"/>
-                </a:solidFill>
-                <a:latin typeface="Arial"/>
+                  <a:srgbClr val="FAF7F0"/>
+                </a:solidFill>
+                <a:latin typeface="Calibri"/>
               </a:rPr>
               <a:t>APP</a:t>
             </a:r>
@@ -8906,7 +8906,7 @@
             <a:r>
               <a:rPr sz="3800" b="1">
                 <a:solidFill>
-                  <a:srgbClr val="1F4D2B"/>
+                  <a:srgbClr val="232323"/>
                 </a:solidFill>
                 <a:latin typeface="Georgia"/>
               </a:rPr>
@@ -8930,7 +8930,7 @@
             <a:avLst/>
           </a:prstGeom>
           <a:solidFill>
-            <a:srgbClr val="E2D8C4"/>
+            <a:srgbClr val="6E9CC4"/>
           </a:solidFill>
           <a:ln>
             <a:noFill/>
@@ -8989,9 +8989,9 @@
             <a:r>
               <a:rPr sz="2400" b="0">
                 <a:solidFill>
-                  <a:srgbClr val="20190F"/>
-                </a:solidFill>
-                <a:latin typeface="Arial"/>
+                  <a:srgbClr val="232323"/>
+                </a:solidFill>
+                <a:latin typeface="Calibri"/>
               </a:rPr>
               <a:t>•  Mentor workspace → People &amp; gardens</a:t>
             </a:r>
@@ -9005,9 +9005,9 @@
             <a:r>
               <a:rPr sz="2400" b="0">
                 <a:solidFill>
-                  <a:srgbClr val="20190F"/>
-                </a:solidFill>
-                <a:latin typeface="Arial"/>
+                  <a:srgbClr val="232323"/>
+                </a:solidFill>
+                <a:latin typeface="Calibri"/>
               </a:rPr>
               <a:t>•  Record visit → five fingers, five fields</a:t>
             </a:r>
@@ -9021,9 +9021,9 @@
             <a:r>
               <a:rPr sz="2400" b="0">
                 <a:solidFill>
-                  <a:srgbClr val="20190F"/>
-                </a:solidFill>
-                <a:latin typeface="Arial"/>
+                  <a:srgbClr val="232323"/>
+                </a:solidFill>
+                <a:latin typeface="Calibri"/>
               </a:rPr>
               <a:t>•  Save offline · it syncs later</a:t>
             </a:r>
@@ -9045,11 +9045,11 @@
             <a:avLst/>
           </a:prstGeom>
           <a:solidFill>
-            <a:srgbClr val="FBF6EC"/>
+            <a:srgbClr val="FAF7F0"/>
           </a:solidFill>
           <a:ln w="15875">
             <a:solidFill>
-              <a:srgbClr val="E2D8C4"/>
+              <a:srgbClr val="6E9CC4"/>
             </a:solidFill>
           </a:ln>
           <a:effectLst/>
@@ -9106,9 +9106,9 @@
             <a:r>
               <a:rPr sz="1200" b="1">
                 <a:solidFill>
-                  <a:srgbClr val="C07A1E"/>
-                </a:solidFill>
-                <a:latin typeface="Arial"/>
+                  <a:srgbClr val="D9622B"/>
+                </a:solidFill>
+                <a:latin typeface="Calibri"/>
               </a:rPr>
               <a:t>POSTER ART · M-P14-ART · coming</a:t>
             </a:r>
@@ -9145,7 +9145,7 @@
             <a:r>
               <a:rPr sz="1800" b="1">
                 <a:solidFill>
-                  <a:srgbClr val="1F4D2B"/>
+                  <a:srgbClr val="232323"/>
                 </a:solidFill>
                 <a:latin typeface="Georgia"/>
               </a:rPr>
@@ -9184,9 +9184,9 @@
             <a:r>
               <a:rPr sz="1100" b="0">
                 <a:solidFill>
-                  <a:srgbClr val="20190F"/>
-                </a:solidFill>
-                <a:latin typeface="Arial"/>
+                  <a:srgbClr val="232323"/>
+                </a:solidFill>
+                <a:latin typeface="Calibri"/>
               </a:rPr>
               <a:t>A path that splits around a tree into two lanes and joins again. Left lane: the youth holds a smartphone (screen blank), showing it to the gogo farmer. Right lane: the gogo writes in an exercise book with a pencil; an envelope of slips and a carbon invoice book beside her. Both lanes pass the same four objects: a hanging scale with a bunch of spinach, a…</a:t>
             </a:r>
@@ -9207,7 +9207,7 @@
     <p:bg>
       <p:bgPr>
         <a:solidFill>
-          <a:srgbClr val="F7F2E9"/>
+          <a:srgbClr val="FAF7F0"/>
         </a:solidFill>
         <a:effectLst/>
       </p:bgPr>
@@ -9249,9 +9249,9 @@
             <a:r>
               <a:rPr sz="1000" b="0">
                 <a:solidFill>
-                  <a:srgbClr val="6B6255"/>
-                </a:solidFill>
-                <a:latin typeface="Arial"/>
+                  <a:srgbClr val="232323"/>
+                </a:solidFill>
+                <a:latin typeface="Calibri"/>
               </a:rPr>
               <a:t>M-D2-07   ·   Poster M-P14</a:t>
             </a:r>
@@ -9288,9 +9288,9 @@
             <a:r>
               <a:rPr sz="1000" b="0">
                 <a:solidFill>
-                  <a:srgbClr val="6B6255"/>
-                </a:solidFill>
-                <a:latin typeface="Arial"/>
+                  <a:srgbClr val="232323"/>
+                </a:solidFill>
+                <a:latin typeface="Calibri"/>
               </a:rPr>
               <a:t>Walking With Farmers</a:t>
             </a:r>
@@ -9327,7 +9327,7 @@
             <a:r>
               <a:rPr sz="3800" b="1">
                 <a:solidFill>
-                  <a:srgbClr val="1F4D2B"/>
+                  <a:srgbClr val="232323"/>
                 </a:solidFill>
                 <a:latin typeface="Georgia"/>
               </a:rPr>
@@ -9351,7 +9351,7 @@
             <a:avLst/>
           </a:prstGeom>
           <a:solidFill>
-            <a:srgbClr val="E2D8C4"/>
+            <a:srgbClr val="6E9CC4"/>
           </a:solidFill>
           <a:ln>
             <a:noFill/>
@@ -9410,9 +9410,9 @@
             <a:r>
               <a:rPr sz="2800" b="0">
                 <a:solidFill>
-                  <a:srgbClr val="20190F"/>
-                </a:solidFill>
-                <a:latin typeface="Arial"/>
+                  <a:srgbClr val="232323"/>
+                </a:solidFill>
+                <a:latin typeface="Calibri"/>
               </a:rPr>
               <a:t>•  Five boxes = five fingers</a:t>
             </a:r>
@@ -9426,9 +9426,9 @@
             <a:r>
               <a:rPr sz="2800" b="0">
                 <a:solidFill>
-                  <a:srgbClr val="20190F"/>
-                </a:solidFill>
-                <a:latin typeface="Arial"/>
+                  <a:srgbClr val="232323"/>
+                </a:solidFill>
+                <a:latin typeface="Calibri"/>
               </a:rPr>
               <a:t>•  Fill it at the farm</a:t>
             </a:r>
@@ -9442,9 +9442,9 @@
             <a:r>
               <a:rPr sz="2800" b="0">
                 <a:solidFill>
-                  <a:srgbClr val="20190F"/>
-                </a:solidFill>
-                <a:latin typeface="Arial"/>
+                  <a:srgbClr val="232323"/>
+                </a:solidFill>
+                <a:latin typeface="Calibri"/>
               </a:rPr>
               <a:t>•  Read it back · leave the card</a:t>
             </a:r>
@@ -9466,11 +9466,11 @@
             <a:avLst/>
           </a:prstGeom>
           <a:solidFill>
-            <a:srgbClr val="FBF6EC"/>
+            <a:srgbClr val="FAF7F0"/>
           </a:solidFill>
           <a:ln w="15875">
             <a:solidFill>
-              <a:srgbClr val="E2D8C4"/>
+              <a:srgbClr val="6E9CC4"/>
             </a:solidFill>
           </a:ln>
           <a:effectLst/>
@@ -9527,9 +9527,9 @@
             <a:r>
               <a:rPr sz="1200" b="1">
                 <a:solidFill>
-                  <a:srgbClr val="C07A1E"/>
-                </a:solidFill>
-                <a:latin typeface="Arial"/>
+                  <a:srgbClr val="D9622B"/>
+                </a:solidFill>
+                <a:latin typeface="Calibri"/>
               </a:rPr>
               <a:t>POSTER ART · M-P14-ART · coming</a:t>
             </a:r>
@@ -9566,7 +9566,7 @@
             <a:r>
               <a:rPr sz="1800" b="1">
                 <a:solidFill>
-                  <a:srgbClr val="1F4D2B"/>
+                  <a:srgbClr val="232323"/>
                 </a:solidFill>
                 <a:latin typeface="Georgia"/>
               </a:rPr>
@@ -9605,9 +9605,9 @@
             <a:r>
               <a:rPr sz="1100" b="0">
                 <a:solidFill>
-                  <a:srgbClr val="20190F"/>
-                </a:solidFill>
-                <a:latin typeface="Arial"/>
+                  <a:srgbClr val="232323"/>
+                </a:solidFill>
+                <a:latin typeface="Calibri"/>
               </a:rPr>
               <a:t>A path that splits around a tree into two lanes and joins again. Left lane: the youth holds a smartphone (screen blank), showing it to the gogo farmer. Right lane: the gogo writes in an exercise book with a pencil; an envelope of slips and a carbon invoice book beside her. Both lanes pass the same four objects: a hanging scale with a bunch of spinach, a…</a:t>
             </a:r>
@@ -9628,7 +9628,7 @@
     <p:bg>
       <p:bgPr>
         <a:solidFill>
-          <a:srgbClr val="F7F2E9"/>
+          <a:srgbClr val="FAF7F0"/>
         </a:solidFill>
         <a:effectLst/>
       </p:bgPr>
@@ -9670,9 +9670,9 @@
             <a:r>
               <a:rPr sz="1000" b="0">
                 <a:solidFill>
-                  <a:srgbClr val="6B6255"/>
-                </a:solidFill>
-                <a:latin typeface="Arial"/>
+                  <a:srgbClr val="232323"/>
+                </a:solidFill>
+                <a:latin typeface="Calibri"/>
               </a:rPr>
               <a:t>M-D2-08   ·   Poster M-P07</a:t>
             </a:r>
@@ -9709,9 +9709,9 @@
             <a:r>
               <a:rPr sz="1000" b="0">
                 <a:solidFill>
-                  <a:srgbClr val="6B6255"/>
-                </a:solidFill>
-                <a:latin typeface="Arial"/>
+                  <a:srgbClr val="232323"/>
+                </a:solidFill>
+                <a:latin typeface="Calibri"/>
               </a:rPr>
               <a:t>Walking With Farmers</a:t>
             </a:r>
@@ -9748,7 +9748,7 @@
             <a:r>
               <a:rPr sz="3800" b="1">
                 <a:solidFill>
-                  <a:srgbClr val="1F4D2B"/>
+                  <a:srgbClr val="232323"/>
                 </a:solidFill>
                 <a:latin typeface="Georgia"/>
               </a:rPr>
@@ -9772,7 +9772,7 @@
             <a:avLst/>
           </a:prstGeom>
           <a:solidFill>
-            <a:srgbClr val="E2D8C4"/>
+            <a:srgbClr val="6E9CC4"/>
           </a:solidFill>
           <a:ln>
             <a:noFill/>
@@ -9831,9 +9831,9 @@
             <a:r>
               <a:rPr sz="2400" b="0">
                 <a:solidFill>
-                  <a:srgbClr val="20190F"/>
-                </a:solidFill>
-                <a:latin typeface="Arial"/>
+                  <a:srgbClr val="232323"/>
+                </a:solidFill>
+                <a:latin typeface="Calibri"/>
               </a:rPr>
               <a:t>•  Mentor leads · Recorder writes and times</a:t>
             </a:r>
@@ -9847,9 +9847,9 @@
             <a:r>
               <a:rPr sz="2400" b="0">
                 <a:solidFill>
-                  <a:srgbClr val="20190F"/>
-                </a:solidFill>
-                <a:latin typeface="Arial"/>
+                  <a:srgbClr val="232323"/>
+                </a:solidFill>
+                <a:latin typeface="Calibri"/>
               </a:rPr>
               <a:t>•  Observer watches, says nothing</a:t>
             </a:r>
@@ -9863,9 +9863,9 @@
             <a:r>
               <a:rPr sz="2400" b="0">
                 <a:solidFill>
-                  <a:srgbClr val="20190F"/>
-                </a:solidFill>
-                <a:latin typeface="Arial"/>
+                  <a:srgbClr val="232323"/>
+                </a:solidFill>
+                <a:latin typeface="Calibri"/>
               </a:rPr>
               <a:t>•  No promises · no gifts · consent</a:t>
             </a:r>
@@ -9887,11 +9887,11 @@
             <a:avLst/>
           </a:prstGeom>
           <a:solidFill>
-            <a:srgbClr val="FBF6EC"/>
+            <a:srgbClr val="FAF7F0"/>
           </a:solidFill>
           <a:ln w="15875">
             <a:solidFill>
-              <a:srgbClr val="E2D8C4"/>
+              <a:srgbClr val="6E9CC4"/>
             </a:solidFill>
           </a:ln>
           <a:effectLst/>
@@ -9948,9 +9948,9 @@
             <a:r>
               <a:rPr sz="1200" b="1">
                 <a:solidFill>
-                  <a:srgbClr val="C07A1E"/>
-                </a:solidFill>
-                <a:latin typeface="Arial"/>
+                  <a:srgbClr val="D9622B"/>
+                </a:solidFill>
+                <a:latin typeface="Calibri"/>
               </a:rPr>
               <a:t>IMAGE · M-IMG-04 · coming</a:t>
             </a:r>
@@ -9987,7 +9987,7 @@
             <a:r>
               <a:rPr sz="1800" b="1">
                 <a:solidFill>
-                  <a:srgbClr val="1F4D2B"/>
+                  <a:srgbClr val="232323"/>
                 </a:solidFill>
                 <a:latin typeface="Georgia"/>
               </a:rPr>
@@ -10026,9 +10026,9 @@
             <a:r>
               <a:rPr sz="1100" b="0">
                 <a:solidFill>
-                  <a:srgbClr val="20190F"/>
-                </a:solidFill>
-                <a:latin typeface="Arial"/>
+                  <a:srgbClr val="232323"/>
+                </a:solidFill>
+                <a:latin typeface="Calibri"/>
               </a:rPr>
               <a:t>Three mentors-in-training (a young woman, an older man, a young man) waiting politely at a farmer's gate; one waves; the farmer walks towards them from the garden; a dog sits calmly by the gate. 16:9.</a:t>
             </a:r>
@@ -10049,7 +10049,7 @@
     <p:bg>
       <p:bgPr>
         <a:solidFill>
-          <a:srgbClr val="F7F2E9"/>
+          <a:srgbClr val="FAF7F0"/>
         </a:solidFill>
         <a:effectLst/>
       </p:bgPr>
@@ -10091,9 +10091,9 @@
             <a:r>
               <a:rPr sz="1000" b="0">
                 <a:solidFill>
-                  <a:srgbClr val="6B6255"/>
-                </a:solidFill>
-                <a:latin typeface="Arial"/>
+                  <a:srgbClr val="232323"/>
+                </a:solidFill>
+                <a:latin typeface="Calibri"/>
               </a:rPr>
               <a:t>M-D2-09   ·   Poster M-P07</a:t>
             </a:r>
@@ -10130,9 +10130,9 @@
             <a:r>
               <a:rPr sz="1000" b="0">
                 <a:solidFill>
-                  <a:srgbClr val="6B6255"/>
-                </a:solidFill>
-                <a:latin typeface="Arial"/>
+                  <a:srgbClr val="232323"/>
+                </a:solidFill>
+                <a:latin typeface="Calibri"/>
               </a:rPr>
               <a:t>Walking With Farmers</a:t>
             </a:r>
@@ -10154,7 +10154,7 @@
             <a:avLst/>
           </a:prstGeom>
           <a:solidFill>
-            <a:srgbClr val="C07A1E"/>
+            <a:srgbClr val="D9622B"/>
           </a:solidFill>
           <a:ln>
             <a:noFill/>
@@ -10213,9 +10213,9 @@
             <a:r>
               <a:rPr sz="1400" b="1">
                 <a:solidFill>
-                  <a:srgbClr val="F7F2E9"/>
-                </a:solidFill>
-                <a:latin typeface="Arial"/>
+                  <a:srgbClr val="FAF7F0"/>
+                </a:solidFill>
+                <a:latin typeface="Calibri"/>
               </a:rPr>
               <a:t>YOUR TURN</a:t>
             </a:r>
@@ -10252,7 +10252,7 @@
             <a:r>
               <a:rPr sz="3800" b="1">
                 <a:solidFill>
-                  <a:srgbClr val="1F4D2B"/>
+                  <a:srgbClr val="232323"/>
                 </a:solidFill>
                 <a:latin typeface="Georgia"/>
               </a:rPr>
@@ -10276,7 +10276,7 @@
             <a:avLst/>
           </a:prstGeom>
           <a:solidFill>
-            <a:srgbClr val="E2D8C4"/>
+            <a:srgbClr val="6E9CC4"/>
           </a:solidFill>
           <a:ln>
             <a:noFill/>
@@ -10335,9 +10335,9 @@
             <a:r>
               <a:rPr sz="2600" b="1">
                 <a:solidFill>
-                  <a:srgbClr val="20190F"/>
-                </a:solidFill>
-                <a:latin typeface="Arial"/>
+                  <a:srgbClr val="232323"/>
+                </a:solidFill>
+                <a:latin typeface="Calibri"/>
               </a:rPr>
               <a:t>•  60 minutes with a real farmer</a:t>
             </a:r>
@@ -10351,9 +10351,9 @@
             <a:r>
               <a:rPr sz="2600" b="1">
                 <a:solidFill>
-                  <a:srgbClr val="20190F"/>
-                </a:solidFill>
-                <a:latin typeface="Arial"/>
+                  <a:srgbClr val="232323"/>
+                </a:solidFill>
+                <a:latin typeface="Calibri"/>
               </a:rPr>
               <a:t>•  5 minutes huddle: two stars, a wish</a:t>
             </a:r>
@@ -10367,9 +10367,9 @@
             <a:r>
               <a:rPr sz="2600" b="1">
                 <a:solidFill>
-                  <a:srgbClr val="20190F"/>
-                </a:solidFill>
-                <a:latin typeface="Arial"/>
+                  <a:srgbClr val="232323"/>
+                </a:solidFill>
+                <a:latin typeface="Calibri"/>
               </a:rPr>
               <a:t>•  Pick-up 11:45</a:t>
             </a:r>
@@ -10391,11 +10391,11 @@
             <a:avLst/>
           </a:prstGeom>
           <a:solidFill>
-            <a:srgbClr val="FBF6EC"/>
+            <a:srgbClr val="FAF7F0"/>
           </a:solidFill>
           <a:ln w="15875">
             <a:solidFill>
-              <a:srgbClr val="E2D8C4"/>
+              <a:srgbClr val="6E9CC4"/>
             </a:solidFill>
           </a:ln>
           <a:effectLst/>
@@ -10452,9 +10452,9 @@
             <a:r>
               <a:rPr sz="1200" b="1">
                 <a:solidFill>
-                  <a:srgbClr val="C07A1E"/>
-                </a:solidFill>
-                <a:latin typeface="Arial"/>
+                  <a:srgbClr val="D9622B"/>
+                </a:solidFill>
+                <a:latin typeface="Calibri"/>
               </a:rPr>
               <a:t>IMAGE · M-IMG-04 · coming</a:t>
             </a:r>
@@ -10491,7 +10491,7 @@
             <a:r>
               <a:rPr sz="1800" b="1">
                 <a:solidFill>
-                  <a:srgbClr val="1F4D2B"/>
+                  <a:srgbClr val="232323"/>
                 </a:solidFill>
                 <a:latin typeface="Georgia"/>
               </a:rPr>
@@ -10530,9 +10530,9 @@
             <a:r>
               <a:rPr sz="1100" b="0">
                 <a:solidFill>
-                  <a:srgbClr val="20190F"/>
-                </a:solidFill>
-                <a:latin typeface="Arial"/>
+                  <a:srgbClr val="232323"/>
+                </a:solidFill>
+                <a:latin typeface="Calibri"/>
               </a:rPr>
               <a:t>Three mentors-in-training (a young woman, an older man, a young man) waiting politely at a farmer's gate; one waves; the farmer walks towards them from the garden; a dog sits calmly by the gate. 16:9.</a:t>
             </a:r>

--- a/courses/build/mentor-3day/M-D2.pptx
+++ b/courses/build/mentor-3day/M-D2.pptx
@@ -602,7 +602,7 @@
           </a:p>
           <a:p>
             <a:r>
-              <a:t>Clip M-ANI-04: public/course-animations/market-community/watch-14-community-network.mp4</a:t>
+              <a:t>Clip M-ANI-04: public/course-media/mentor-3day/M-ANI-04.mp4</a:t>
             </a:r>
           </a:p>
         </p:txBody>
@@ -1225,7 +1225,7 @@
           </a:p>
           <a:p>
             <a:r>
-              <a:t>Clip M-ANI-07: public/course-animations/soil-health/tour-soil-observation.mp4</a:t>
+              <a:t>Clip M-ANI-07: public/course-media/mentor-3day/M-ANI-07.mp4</a:t>
             </a:r>
           </a:p>
         </p:txBody>
@@ -1311,7 +1311,7 @@
           </a:p>
           <a:p>
             <a:r>
-              <a:t>Clip M-ANI-06: public/course-animations/market-community/watch-09-surplus-routes.mp4</a:t>
+              <a:t>Clip M-ANI-06: public/course-media/mentor-3day/M-ANI-06.mp4</a:t>
             </a:r>
           </a:p>
           <a:p>
@@ -8161,49 +8161,27 @@
           </a:p>
         </p:txBody>
       </p:sp>
-      <p:pic>
-        <p:nvPicPr>
-          <p:cNvPr id="9" name="Picture 8" descr="tour-soil-observation.jpg"/>
-          <p:cNvPicPr>
-            <a:picLocks noChangeAspect="1"/>
-          </p:cNvPicPr>
-          <p:nvPr/>
-        </p:nvPicPr>
-        <p:blipFill>
-          <a:blip r:embed="rId2"/>
-          <a:stretch>
-            <a:fillRect/>
-          </a:stretch>
-        </p:blipFill>
-        <p:spPr>
-          <a:xfrm>
-            <a:off x="5852160" y="2148840"/>
-            <a:ext cx="5852160" cy="4023360"/>
-          </a:xfrm>
-          <a:prstGeom prst="rect">
-            <a:avLst/>
-          </a:prstGeom>
-        </p:spPr>
-      </p:pic>
-      <p:sp>
-        <p:nvSpPr>
-          <p:cNvPr id="10" name="Rectangle 9"/>
+      <p:sp>
+        <p:nvSpPr>
+          <p:cNvPr id="9" name="Rectangle 8"/>
           <p:cNvSpPr/>
           <p:nvPr/>
         </p:nvSpPr>
         <p:spPr>
           <a:xfrm>
-            <a:off x="5852160" y="5806440"/>
-            <a:ext cx="5852160" cy="411480"/>
+            <a:off x="5852160" y="2103120"/>
+            <a:ext cx="5852160" cy="4114800"/>
           </a:xfrm>
           <a:prstGeom prst="rect">
             <a:avLst/>
           </a:prstGeom>
           <a:solidFill>
-            <a:srgbClr val="232323"/>
+            <a:srgbClr val="FAF7F0"/>
           </a:solidFill>
-          <a:ln>
-            <a:noFill/>
+          <a:ln w="15875">
+            <a:solidFill>
+              <a:srgbClr val="6E9CC4"/>
+            </a:solidFill>
           </a:ln>
           <a:effectLst/>
         </p:spPr>
@@ -8231,14 +8209,53 @@
       </p:sp>
       <p:sp>
         <p:nvSpPr>
+          <p:cNvPr id="10" name="TextBox 9"/>
+          <p:cNvSpPr txBox="1"/>
+          <p:nvPr/>
+        </p:nvSpPr>
+        <p:spPr>
+          <a:xfrm>
+            <a:off x="6080760" y="2286000"/>
+            <a:ext cx="5394960" cy="365760"/>
+          </a:xfrm>
+          <a:prstGeom prst="rect">
+            <a:avLst/>
+          </a:prstGeom>
+          <a:noFill/>
+        </p:spPr>
+        <p:txBody>
+          <a:bodyPr wrap="square" anchor="t" lIns="45720" rIns="45720">
+            <a:spAutoFit/>
+          </a:bodyPr>
+          <a:lstStyle/>
+          <a:p>
+            <a:pPr algn="l">
+              <a:spcAft>
+                <a:spcPts val="800"/>
+              </a:spcAft>
+            </a:pPr>
+            <a:r>
+              <a:rPr sz="1200" b="1">
+                <a:solidFill>
+                  <a:srgbClr val="D9622B"/>
+                </a:solidFill>
+                <a:latin typeface="Calibri"/>
+              </a:rPr>
+              <a:t>ANIMATION · M-ANI-07 · coming</a:t>
+            </a:r>
+          </a:p>
+        </p:txBody>
+      </p:sp>
+      <p:sp>
+        <p:nvSpPr>
           <p:cNvPr id="11" name="TextBox 10"/>
           <p:cNvSpPr txBox="1"/>
           <p:nvPr/>
         </p:nvSpPr>
         <p:spPr>
           <a:xfrm>
-            <a:off x="5943600" y="5815584"/>
-            <a:ext cx="5669280" cy="384048"/>
+            <a:off x="6080760" y="2670048"/>
+            <a:ext cx="5394960" cy="457200"/>
           </a:xfrm>
           <a:prstGeom prst="rect">
             <a:avLst/>
@@ -8246,7 +8263,7 @@
           <a:noFill/>
         </p:spPr>
         <p:txBody>
-          <a:bodyPr wrap="square" anchor="ctr" lIns="45720" rIns="45720">
+          <a:bodyPr wrap="square" anchor="t" lIns="45720" rIns="45720">
             <a:spAutoFit/>
           </a:bodyPr>
           <a:lstStyle/>
@@ -8257,13 +8274,52 @@
               </a:spcAft>
             </a:pPr>
             <a:r>
+              <a:rPr sz="1800" b="1">
+                <a:solidFill>
+                  <a:srgbClr val="232323"/>
+                </a:solidFill>
+                <a:latin typeface="Georgia"/>
+              </a:rPr>
+              <a:t>Looking at soil</a:t>
+            </a:r>
+          </a:p>
+        </p:txBody>
+      </p:sp>
+      <p:sp>
+        <p:nvSpPr>
+          <p:cNvPr id="12" name="TextBox 11"/>
+          <p:cNvSpPr txBox="1"/>
+          <p:nvPr/>
+        </p:nvSpPr>
+        <p:spPr>
+          <a:xfrm>
+            <a:off x="6080760" y="3200400"/>
+            <a:ext cx="5394960" cy="2834640"/>
+          </a:xfrm>
+          <a:prstGeom prst="rect">
+            <a:avLst/>
+          </a:prstGeom>
+          <a:noFill/>
+        </p:spPr>
+        <p:txBody>
+          <a:bodyPr wrap="square" anchor="t" lIns="45720" rIns="45720">
+            <a:spAutoFit/>
+          </a:bodyPr>
+          <a:lstStyle/>
+          <a:p>
+            <a:pPr algn="l">
+              <a:spcAft>
+                <a:spcPts val="800"/>
+              </a:spcAft>
+            </a:pPr>
+            <a:r>
               <a:rPr sz="1100" b="0">
                 <a:solidFill>
-                  <a:srgbClr val="FAF7F0"/>
+                  <a:srgbClr val="232323"/>
                 </a:solidFill>
                 <a:latin typeface="Calibri"/>
               </a:rPr>
-              <a:t>▶  Clip M-ANI-07 · play from the tablet: tour-soil-observation.mp4</a:t>
+              <a:t>Hands dig a spade-deep square of garden soil, lift it and crumble it: dark crumbs, fine roots, an earthworm, fungus threads. Beside it a pale hard lump from a path cracks apart with nothing living in it. Slow side-by-side comparison. (Replaces the withdrawn clip `soil-health/tour-soil-observation.mp4`.)</a:t>
             </a:r>
           </a:p>
         </p:txBody>
